--- a/CalendarioAgo25/Presentaciones/13_QoS.pptx
+++ b/CalendarioAgo25/Presentaciones/13_QoS.pptx
@@ -150,6 +150,35 @@
 </p:presentation>
 </file>
 
+<file path=ppt/changesInfos/changesInfo1.xml><?xml version="1.0" encoding="utf-8"?>
+<pc:chgInfo xmlns:a="http://schemas.openxmlformats.org/drawingml/2006/main" xmlns:r="http://schemas.openxmlformats.org/officeDocument/2006/relationships" xmlns:ac="http://schemas.microsoft.com/office/drawing/2013/main/command" xmlns:pc="http://schemas.microsoft.com/office/powerpoint/2013/main/command">
+  <pc:docChgLst>
+    <pc:chgData name="Lizethe Pérez Fuertes" userId="4ae9ef87-2a7d-42f8-8dfa-0a501a9e2ff4" providerId="ADAL" clId="{FDDD45CB-1330-4033-A842-3D2746AFF7C7}"/>
+    <pc:docChg chg="modSld">
+      <pc:chgData name="Lizethe Pérez Fuertes" userId="4ae9ef87-2a7d-42f8-8dfa-0a501a9e2ff4" providerId="ADAL" clId="{FDDD45CB-1330-4033-A842-3D2746AFF7C7}" dt="2025-11-26T16:10:09.408" v="1" actId="790"/>
+      <pc:docMkLst>
+        <pc:docMk/>
+      </pc:docMkLst>
+      <pc:sldChg chg="modSp mod">
+        <pc:chgData name="Lizethe Pérez Fuertes" userId="4ae9ef87-2a7d-42f8-8dfa-0a501a9e2ff4" providerId="ADAL" clId="{FDDD45CB-1330-4033-A842-3D2746AFF7C7}" dt="2025-11-26T16:10:09.408" v="1" actId="790"/>
+        <pc:sldMkLst>
+          <pc:docMk/>
+          <pc:sldMk cId="200726961" sldId="1259"/>
+        </pc:sldMkLst>
+        <pc:spChg chg="mod">
+          <ac:chgData name="Lizethe Pérez Fuertes" userId="4ae9ef87-2a7d-42f8-8dfa-0a501a9e2ff4" providerId="ADAL" clId="{FDDD45CB-1330-4033-A842-3D2746AFF7C7}" dt="2025-11-26T16:10:09.408" v="1" actId="790"/>
+          <ac:spMkLst>
+            <pc:docMk/>
+            <pc:sldMk cId="200726961" sldId="1259"/>
+            <ac:spMk id="3078" creationId="{00000000-0000-0000-0000-000000000000}"/>
+          </ac:spMkLst>
+        </pc:spChg>
+      </pc:sldChg>
+    </pc:docChg>
+  </pc:docChgLst>
+</pc:chgInfo>
+</file>
+
 <file path=ppt/notesMasters/notesMaster1.xml><?xml version="1.0" encoding="utf-8"?>
 <p:notesMaster xmlns:a="http://schemas.openxmlformats.org/drawingml/2006/main" xmlns:r="http://schemas.openxmlformats.org/officeDocument/2006/relationships" xmlns:p="http://schemas.openxmlformats.org/presentationml/2006/main">
   <p:cSld>
@@ -232,7 +261,7 @@
           <a:p>
             <a:fld id="{2D445F07-8756-451B-A938-0248325FC7BB}" type="datetimeFigureOut">
               <a:rPr lang="es-MX" smtClean="0"/>
-              <a:t>28/04/2025</a:t>
+              <a:t>26/11/2025</a:t>
             </a:fld>
             <a:endParaRPr lang="es-MX" dirty="0"/>
           </a:p>
@@ -391,7 +420,7 @@
           <a:p>
             <a:fld id="{5993AEC0-242E-4FA7-9D3C-51E1036AC3CB}" type="slidenum">
               <a:rPr lang="es-MX" smtClean="0"/>
-              <a:t>‹#›</a:t>
+              <a:t>‹Nº›</a:t>
             </a:fld>
             <a:endParaRPr lang="es-MX" dirty="0"/>
           </a:p>
@@ -2529,7 +2558,7 @@
           <a:p>
             <a:fld id="{5E75A0DC-66C6-4CEC-A5EB-F8C97CEC3796}" type="datetimeFigureOut">
               <a:rPr lang="es-MX" smtClean="0"/>
-              <a:t>28/04/2025</a:t>
+              <a:t>26/11/2025</a:t>
             </a:fld>
             <a:endParaRPr lang="es-MX" dirty="0"/>
           </a:p>
@@ -2571,7 +2600,7 @@
           <a:p>
             <a:fld id="{C077EE1E-7A06-4E7F-9AFB-189FC69B7B0C}" type="slidenum">
               <a:rPr lang="es-MX" smtClean="0"/>
-              <a:t>‹#›</a:t>
+              <a:t>‹Nº›</a:t>
             </a:fld>
             <a:endParaRPr lang="es-MX" dirty="0"/>
           </a:p>
@@ -2699,7 +2728,7 @@
           <a:p>
             <a:fld id="{5E75A0DC-66C6-4CEC-A5EB-F8C97CEC3796}" type="datetimeFigureOut">
               <a:rPr lang="es-MX" smtClean="0"/>
-              <a:t>28/04/2025</a:t>
+              <a:t>26/11/2025</a:t>
             </a:fld>
             <a:endParaRPr lang="es-MX" dirty="0"/>
           </a:p>
@@ -2741,7 +2770,7 @@
           <a:p>
             <a:fld id="{C077EE1E-7A06-4E7F-9AFB-189FC69B7B0C}" type="slidenum">
               <a:rPr lang="es-MX" smtClean="0"/>
-              <a:t>‹#›</a:t>
+              <a:t>‹Nº›</a:t>
             </a:fld>
             <a:endParaRPr lang="es-MX" dirty="0"/>
           </a:p>
@@ -2879,7 +2908,7 @@
           <a:p>
             <a:fld id="{5E75A0DC-66C6-4CEC-A5EB-F8C97CEC3796}" type="datetimeFigureOut">
               <a:rPr lang="es-MX" smtClean="0"/>
-              <a:t>28/04/2025</a:t>
+              <a:t>26/11/2025</a:t>
             </a:fld>
             <a:endParaRPr lang="es-MX" dirty="0"/>
           </a:p>
@@ -2921,7 +2950,7 @@
           <a:p>
             <a:fld id="{C077EE1E-7A06-4E7F-9AFB-189FC69B7B0C}" type="slidenum">
               <a:rPr lang="es-MX" smtClean="0"/>
-              <a:t>‹#›</a:t>
+              <a:t>‹Nº›</a:t>
             </a:fld>
             <a:endParaRPr lang="es-MX" dirty="0"/>
           </a:p>
@@ -3211,7 +3240,7 @@
           <a:p>
             <a:fld id="{5E75A0DC-66C6-4CEC-A5EB-F8C97CEC3796}" type="datetimeFigureOut">
               <a:rPr lang="es-MX" smtClean="0"/>
-              <a:t>28/04/2025</a:t>
+              <a:t>26/11/2025</a:t>
             </a:fld>
             <a:endParaRPr lang="es-MX" dirty="0"/>
           </a:p>
@@ -3253,7 +3282,7 @@
           <a:p>
             <a:fld id="{C077EE1E-7A06-4E7F-9AFB-189FC69B7B0C}" type="slidenum">
               <a:rPr lang="es-MX" smtClean="0"/>
-              <a:t>‹#›</a:t>
+              <a:t>‹Nº›</a:t>
             </a:fld>
             <a:endParaRPr lang="es-MX" dirty="0"/>
           </a:p>
@@ -3457,7 +3486,7 @@
           <a:p>
             <a:fld id="{5E75A0DC-66C6-4CEC-A5EB-F8C97CEC3796}" type="datetimeFigureOut">
               <a:rPr lang="es-MX" smtClean="0"/>
-              <a:t>28/04/2025</a:t>
+              <a:t>26/11/2025</a:t>
             </a:fld>
             <a:endParaRPr lang="es-MX" dirty="0"/>
           </a:p>
@@ -3499,7 +3528,7 @@
           <a:p>
             <a:fld id="{C077EE1E-7A06-4E7F-9AFB-189FC69B7B0C}" type="slidenum">
               <a:rPr lang="es-MX" smtClean="0"/>
-              <a:t>‹#›</a:t>
+              <a:t>‹Nº›</a:t>
             </a:fld>
             <a:endParaRPr lang="es-MX" dirty="0"/>
           </a:p>
@@ -3745,7 +3774,7 @@
           <a:p>
             <a:fld id="{5E75A0DC-66C6-4CEC-A5EB-F8C97CEC3796}" type="datetimeFigureOut">
               <a:rPr lang="es-MX" smtClean="0"/>
-              <a:t>28/04/2025</a:t>
+              <a:t>26/11/2025</a:t>
             </a:fld>
             <a:endParaRPr lang="es-MX" dirty="0"/>
           </a:p>
@@ -3787,7 +3816,7 @@
           <a:p>
             <a:fld id="{C077EE1E-7A06-4E7F-9AFB-189FC69B7B0C}" type="slidenum">
               <a:rPr lang="es-MX" smtClean="0"/>
-              <a:t>‹#›</a:t>
+              <a:t>‹Nº›</a:t>
             </a:fld>
             <a:endParaRPr lang="es-MX" dirty="0"/>
           </a:p>
@@ -4167,7 +4196,7 @@
           <a:p>
             <a:fld id="{5E75A0DC-66C6-4CEC-A5EB-F8C97CEC3796}" type="datetimeFigureOut">
               <a:rPr lang="es-MX" smtClean="0"/>
-              <a:t>28/04/2025</a:t>
+              <a:t>26/11/2025</a:t>
             </a:fld>
             <a:endParaRPr lang="es-MX" dirty="0"/>
           </a:p>
@@ -4209,7 +4238,7 @@
           <a:p>
             <a:fld id="{C077EE1E-7A06-4E7F-9AFB-189FC69B7B0C}" type="slidenum">
               <a:rPr lang="es-MX" smtClean="0"/>
-              <a:t>‹#›</a:t>
+              <a:t>‹Nº›</a:t>
             </a:fld>
             <a:endParaRPr lang="es-MX" dirty="0"/>
           </a:p>
@@ -4285,7 +4314,7 @@
           <a:p>
             <a:fld id="{5E75A0DC-66C6-4CEC-A5EB-F8C97CEC3796}" type="datetimeFigureOut">
               <a:rPr lang="es-MX" smtClean="0"/>
-              <a:t>28/04/2025</a:t>
+              <a:t>26/11/2025</a:t>
             </a:fld>
             <a:endParaRPr lang="es-MX" dirty="0"/>
           </a:p>
@@ -4327,7 +4356,7 @@
           <a:p>
             <a:fld id="{C077EE1E-7A06-4E7F-9AFB-189FC69B7B0C}" type="slidenum">
               <a:rPr lang="es-MX" smtClean="0"/>
-              <a:t>‹#›</a:t>
+              <a:t>‹Nº›</a:t>
             </a:fld>
             <a:endParaRPr lang="es-MX" dirty="0"/>
           </a:p>
@@ -4380,7 +4409,7 @@
           <a:p>
             <a:fld id="{5E75A0DC-66C6-4CEC-A5EB-F8C97CEC3796}" type="datetimeFigureOut">
               <a:rPr lang="es-MX" smtClean="0"/>
-              <a:t>28/04/2025</a:t>
+              <a:t>26/11/2025</a:t>
             </a:fld>
             <a:endParaRPr lang="es-MX" dirty="0"/>
           </a:p>
@@ -4422,7 +4451,7 @@
           <a:p>
             <a:fld id="{C077EE1E-7A06-4E7F-9AFB-189FC69B7B0C}" type="slidenum">
               <a:rPr lang="es-MX" smtClean="0"/>
-              <a:t>‹#›</a:t>
+              <a:t>‹Nº›</a:t>
             </a:fld>
             <a:endParaRPr lang="es-MX" dirty="0"/>
           </a:p>
@@ -4657,7 +4686,7 @@
           <a:p>
             <a:fld id="{5E75A0DC-66C6-4CEC-A5EB-F8C97CEC3796}" type="datetimeFigureOut">
               <a:rPr lang="es-MX" smtClean="0"/>
-              <a:t>28/04/2025</a:t>
+              <a:t>26/11/2025</a:t>
             </a:fld>
             <a:endParaRPr lang="es-MX" dirty="0"/>
           </a:p>
@@ -4699,7 +4728,7 @@
           <a:p>
             <a:fld id="{C077EE1E-7A06-4E7F-9AFB-189FC69B7B0C}" type="slidenum">
               <a:rPr lang="es-MX" smtClean="0"/>
-              <a:t>‹#›</a:t>
+              <a:t>‹Nº›</a:t>
             </a:fld>
             <a:endParaRPr lang="es-MX" dirty="0"/>
           </a:p>
@@ -4910,7 +4939,7 @@
           <a:p>
             <a:fld id="{5E75A0DC-66C6-4CEC-A5EB-F8C97CEC3796}" type="datetimeFigureOut">
               <a:rPr lang="es-MX" smtClean="0"/>
-              <a:t>28/04/2025</a:t>
+              <a:t>26/11/2025</a:t>
             </a:fld>
             <a:endParaRPr lang="es-MX" dirty="0"/>
           </a:p>
@@ -4952,7 +4981,7 @@
           <a:p>
             <a:fld id="{C077EE1E-7A06-4E7F-9AFB-189FC69B7B0C}" type="slidenum">
               <a:rPr lang="es-MX" smtClean="0"/>
-              <a:t>‹#›</a:t>
+              <a:t>‹Nº›</a:t>
             </a:fld>
             <a:endParaRPr lang="es-MX" dirty="0"/>
           </a:p>
@@ -5123,7 +5152,7 @@
           <a:p>
             <a:fld id="{5E75A0DC-66C6-4CEC-A5EB-F8C97CEC3796}" type="datetimeFigureOut">
               <a:rPr lang="es-MX" smtClean="0"/>
-              <a:t>28/04/2025</a:t>
+              <a:t>26/11/2025</a:t>
             </a:fld>
             <a:endParaRPr lang="es-MX" dirty="0"/>
           </a:p>
@@ -5201,7 +5230,7 @@
           <a:p>
             <a:fld id="{C077EE1E-7A06-4E7F-9AFB-189FC69B7B0C}" type="slidenum">
               <a:rPr lang="es-MX" smtClean="0"/>
-              <a:t>‹#›</a:t>
+              <a:t>‹Nº›</a:t>
             </a:fld>
             <a:endParaRPr lang="es-MX" dirty="0"/>
           </a:p>
